--- a/PPTs/L5 LiDAR Perception.pptx
+++ b/PPTs/L5 LiDAR Perception.pptx
@@ -2739,7 +2739,7 @@
           <a:lstStyle/>
           <a:p>
             <a:r>
-              <a:t>Beer-Lambert: P_rx falls as exp(-2 alpha R) because the light travels out and back. Koschmieder: alpha ~ 3.91/visibility. With 200 m visibility (dense fog), only 1.8% of the signal survives at 100 m. Waymo mitigates with full-waveform sampling and adaptive thresholds to separate droplet returns from hard targets.</a:t>
+              <a:t>Beer-Lambert: P_rx falls as exp(-2 alpha R) because the light travels out and back. Koschmieder: alpha ~ 3.91/visibility. With 200 m visibility (dense fog), only about 2% of the signal survives at 100 m (1.8% for the rounded alpha = 0.02 /m plotted). Waymo mitigates with full-waveform sampling and adaptive thresholds to separate droplet returns from hard targets.</a:t>
             </a:r>
           </a:p>
         </p:txBody>
@@ -5749,7 +5749,7 @@
           <a:lstStyle/>
           <a:p>
             <a:r>
-              <a:t>Most deployed automotive LiDAR is pulsed ToF. FMCW sends a frequency chirp and mixes the echo with a local copy; the beat frequency gives range and the Doppler shift gives radial velocity directly. FMCW is attractive for velocity and interference robustness but is harder to build.</a:t>
+              <a:t>Most deployed automotive LiDAR is pulsed ToF (Luminar filed for Chapter 11 in Dec 2025; its lidar assets were sold to MicroVision in Jan 2026). FMCW sends a frequency chirp and mixes the echo with a local copy; the beat frequency gives range and the Doppler shift gives radial velocity directly. FMCW is attractive for velocity and interference robustness but is harder to build.</a:t>
             </a:r>
           </a:p>
         </p:txBody>
@@ -33300,7 +33300,7 @@
                   <a:srgbClr val="404040"/>
                 </a:solidFill>
               </a:rPr>
-              <a:t>[18] Y. Cao et al., Adversarial sensor attack on LiDAR-based perception, ACM CCS 2019.</a:t>
+              <a:t>[18] Y. Cao et al., Adversarial sensor attack on LiDAR-based perception in autonomous driving, ACM CCS 2019.</a:t>
             </a:r>
           </a:p>
           <a:p>
@@ -34151,7 +34151,7 @@
                             <a:srgbClr val="404040"/>
                           </a:solidFill>
                         </a:rPr>
-                        <a:t>Hesai, Ouster, Luminar, Waymo</a:t>
+                        <a:t>Hesai, Ouster, Waymo, Luminar (Ch. 11, 2025)</a:t>
                       </a:r>
                     </a:p>
                   </a:txBody>
